--- a/tests/testthat/docs_dir/expected_ph_with_dots_test.pptx
+++ b/tests/testthat/docs_dir/expected_ph_with_dots_test.pptx
@@ -3634,7 +3634,7 @@
           <a:p>
             <a:r>
               <a:rPr/>
-              <a:t>10/19/25</a:t>
+              <a:t>10/21/25</a:t>
             </a:r>
           </a:p>
         </p:txBody>

--- a/tests/testthat/docs_dir/expected_ph_with_dots_test.pptx
+++ b/tests/testthat/docs_dir/expected_ph_with_dots_test.pptx
@@ -3634,7 +3634,7 @@
           <a:p>
             <a:r>
               <a:rPr/>
-              <a:t>10/21/25</a:t>
+              <a:t>08/05/26</a:t>
             </a:r>
           </a:p>
         </p:txBody>
